--- a/test/A2_Query_Flow.pptx
+++ b/test/A2_Query_Flow.pptx
@@ -4342,8 +4342,9 @@
                   <a:srgbClr val="175CA6"/>
                 </a:solidFill>
               </a:rPr>
-              <a:t>prompt +
-snapshot</a:t>
+              <a:t>SYSTEM_PROMPT
++ snapshot
++ history</a:t>
             </a:r>
           </a:p>
         </p:txBody>
@@ -5836,7 +5837,7 @@
                   <a:srgbClr val="444444"/>
                 </a:solidFill>
               </a:rPr>
-              <a:t>HTTP POST {session, message} to Orchestrator /chat</a:t>
+              <a:t>HTTP POST {session_id, message} → Orchestrator /chat  (pure stdlib urllib; --session flag)</a:t>
             </a:r>
           </a:p>
         </p:txBody>
@@ -6028,7 +6029,7 @@
                   <a:srgbClr val="444444"/>
                 </a:solidFill>
               </a:rPr>
-              <a:t>Injects live network snapshot; calls Gemini</a:t>
+              <a:t>Calls build_network_context() → GET /network; appends snapshot to SYSTEM_PROMPT; sends to Gemini</a:t>
             </a:r>
           </a:p>
         </p:txBody>
@@ -6412,7 +6413,7 @@
                   <a:srgbClr val="444444"/>
                 </a:solidFill>
               </a:rPr>
-              <a:t>GET /alerts?alert_type=OVERLOAD on Controller</a:t>
+              <a:t>Dispatches get_alerts → direct Flux query on InfluxDB; yields *[calling tool...]* inline</a:t>
             </a:r>
           </a:p>
         </p:txBody>
@@ -6511,7 +6512,7 @@
             <a:avLst/>
           </a:prstGeom>
           <a:solidFill>
-            <a:srgbClr val="007E8A"/>
+            <a:srgbClr val="444444"/>
           </a:solidFill>
           <a:ln w="3810">
             <a:solidFill>
@@ -6570,7 +6571,7 @@
                   <a:srgbClr val="FFFFFF"/>
                 </a:solidFill>
               </a:rPr>
-              <a:t>Controller</a:t>
+              <a:t>InfluxDB</a:t>
             </a:r>
           </a:p>
         </p:txBody>
@@ -6604,7 +6605,7 @@
                   <a:srgbClr val="444444"/>
                 </a:solidFill>
               </a:rPr>
-              <a:t>Queries InfluxDB alerts filtered by OVERLOAD type</a:t>
+              <a:t>Returns OVERLOAD records with cell_id, severity, confidence ≥ 0.70</a:t>
             </a:r>
           </a:p>
         </p:txBody>
@@ -6703,7 +6704,7 @@
             <a:avLst/>
           </a:prstGeom>
           <a:solidFill>
-            <a:srgbClr val="444444"/>
+            <a:srgbClr val="0A2955"/>
           </a:solidFill>
           <a:ln w="3810">
             <a:solidFill>
@@ -6762,7 +6763,7 @@
                   <a:srgbClr val="FFFFFF"/>
                 </a:solidFill>
               </a:rPr>
-              <a:t>InfluxDB</a:t>
+              <a:t>Orchestrator</a:t>
             </a:r>
           </a:p>
         </p:txBody>
@@ -6796,7 +6797,7 @@
                   <a:srgbClr val="444444"/>
                 </a:solidFill>
               </a:rPr>
-              <a:t>Returns OVERLOAD records with cell_id, severity, confidence</a:t>
+              <a:t>JSON-sanitises result; appends FunctionResponse to session history; re-calls Gemini (while True loop)</a:t>
             </a:r>
           </a:p>
         </p:txBody>
@@ -6895,7 +6896,7 @@
             <a:avLst/>
           </a:prstGeom>
           <a:solidFill>
-            <a:srgbClr val="0A2955"/>
+            <a:srgbClr val="5A238C"/>
           </a:solidFill>
           <a:ln w="3810">
             <a:solidFill>
@@ -6954,7 +6955,7 @@
                   <a:srgbClr val="FFFFFF"/>
                 </a:solidFill>
               </a:rPr>
-              <a:t>Orchestrator</a:t>
+              <a:t>Gemini LLM</a:t>
             </a:r>
           </a:p>
         </p:txBody>
@@ -6988,7 +6989,7 @@
                   <a:srgbClr val="444444"/>
                 </a:solidFill>
               </a:rPr>
-              <a:t>Passes alert list to Gemini</a:t>
+              <a:t>Lists overloaded cells with severity and confidence score; loop exits</a:t>
             </a:r>
           </a:p>
         </p:txBody>
@@ -7180,7 +7181,7 @@
                   <a:srgbClr val="444444"/>
                 </a:solidFill>
               </a:rPr>
-              <a:t>Lists overloaded cells with severity and confidence score</a:t>
+              <a:t>Generates natural language overload report</a:t>
             </a:r>
           </a:p>
         </p:txBody>
@@ -7279,7 +7280,7 @@
             <a:avLst/>
           </a:prstGeom>
           <a:solidFill>
-            <a:srgbClr val="5A238C"/>
+            <a:srgbClr val="0A2955"/>
           </a:solidFill>
           <a:ln w="3810">
             <a:solidFill>
@@ -7338,7 +7339,7 @@
                   <a:srgbClr val="FFFFFF"/>
                 </a:solidFill>
               </a:rPr>
-              <a:t>Gemini LLM</a:t>
+              <a:t>Orchestrator</a:t>
             </a:r>
           </a:p>
         </p:txBody>
@@ -7372,7 +7373,7 @@
                   <a:srgbClr val="444444"/>
                 </a:solidFill>
               </a:rPr>
-              <a:t>Generates natural language overload report</a:t>
+              <a:t>Streams text/plain chunks via sync generator (StreamingResponse)</a:t>
             </a:r>
           </a:p>
         </p:txBody>
@@ -7471,198 +7472,6 @@
             <a:avLst/>
           </a:prstGeom>
           <a:solidFill>
-            <a:srgbClr val="0A2955"/>
-          </a:solidFill>
-          <a:ln w="3810">
-            <a:solidFill>
-              <a:srgbClr val="AAAAAA"/>
-            </a:solidFill>
-          </a:ln>
-        </p:spPr>
-        <p:style>
-          <a:lnRef idx="1">
-            <a:schemeClr val="accent1"/>
-          </a:lnRef>
-          <a:fillRef idx="3">
-            <a:schemeClr val="accent1"/>
-          </a:fillRef>
-          <a:effectRef idx="2">
-            <a:schemeClr val="accent1"/>
-          </a:effectRef>
-          <a:fontRef idx="minor">
-            <a:schemeClr val="lt1"/>
-          </a:fontRef>
-        </p:style>
-        <p:txBody>
-          <a:bodyPr rtlCol="0" anchor="ctr"/>
-          <a:lstStyle/>
-          <a:p>
-            <a:pPr algn="ctr"/>
-          </a:p>
-        </p:txBody>
-      </p:sp>
-      <p:sp>
-        <p:nvSpPr>
-          <p:cNvPr id="58" name="TextBox 57"/>
-          <p:cNvSpPr txBox="1"/>
-          <p:nvPr/>
-        </p:nvSpPr>
-        <p:spPr>
-          <a:xfrm>
-            <a:off x="868680" y="5001768"/>
-            <a:ext cx="1463040" cy="274320"/>
-          </a:xfrm>
-          <a:prstGeom prst="rect">
-            <a:avLst/>
-          </a:prstGeom>
-          <a:noFill/>
-        </p:spPr>
-        <p:txBody>
-          <a:bodyPr wrap="square">
-            <a:spAutoFit/>
-          </a:bodyPr>
-          <a:lstStyle/>
-          <a:p>
-            <a:pPr algn="ctr"/>
-            <a:r>
-              <a:rPr sz="900" b="1" i="0">
-                <a:solidFill>
-                  <a:srgbClr val="FFFFFF"/>
-                </a:solidFill>
-              </a:rPr>
-              <a:t>Orchestrator</a:t>
-            </a:r>
-          </a:p>
-        </p:txBody>
-      </p:sp>
-      <p:sp>
-        <p:nvSpPr>
-          <p:cNvPr id="59" name="TextBox 58"/>
-          <p:cNvSpPr txBox="1"/>
-          <p:nvPr/>
-        </p:nvSpPr>
-        <p:spPr>
-          <a:xfrm>
-            <a:off x="2423160" y="4974336"/>
-            <a:ext cx="9418320" cy="329184"/>
-          </a:xfrm>
-          <a:prstGeom prst="rect">
-            <a:avLst/>
-          </a:prstGeom>
-          <a:noFill/>
-        </p:spPr>
-        <p:txBody>
-          <a:bodyPr wrap="square">
-            <a:spAutoFit/>
-          </a:bodyPr>
-          <a:lstStyle/>
-          <a:p>
-            <a:pPr algn="l"/>
-            <a:r>
-              <a:rPr sz="1000" b="0" i="0">
-                <a:solidFill>
-                  <a:srgbClr val="444444"/>
-                </a:solidFill>
-              </a:rPr>
-              <a:t>Returns HTTP response {reply} to chat.py</a:t>
-            </a:r>
-          </a:p>
-        </p:txBody>
-      </p:sp>
-      <p:sp>
-        <p:nvSpPr>
-          <p:cNvPr id="60" name="Rectangle 59"/>
-          <p:cNvSpPr/>
-          <p:nvPr/>
-        </p:nvSpPr>
-        <p:spPr>
-          <a:xfrm>
-            <a:off x="274320" y="5340096"/>
-            <a:ext cx="11612880" cy="402336"/>
-          </a:xfrm>
-          <a:prstGeom prst="rect">
-            <a:avLst/>
-          </a:prstGeom>
-          <a:solidFill>
-            <a:srgbClr val="E8ECF2"/>
-          </a:solidFill>
-          <a:ln w="3810">
-            <a:solidFill>
-              <a:srgbClr val="CCCCCC"/>
-            </a:solidFill>
-          </a:ln>
-        </p:spPr>
-        <p:style>
-          <a:lnRef idx="1">
-            <a:schemeClr val="accent1"/>
-          </a:lnRef>
-          <a:fillRef idx="3">
-            <a:schemeClr val="accent1"/>
-          </a:fillRef>
-          <a:effectRef idx="2">
-            <a:schemeClr val="accent1"/>
-          </a:effectRef>
-          <a:fontRef idx="minor">
-            <a:schemeClr val="lt1"/>
-          </a:fontRef>
-        </p:style>
-        <p:txBody>
-          <a:bodyPr rtlCol="0" anchor="ctr"/>
-          <a:lstStyle/>
-          <a:p>
-            <a:pPr algn="ctr"/>
-          </a:p>
-        </p:txBody>
-      </p:sp>
-      <p:sp>
-        <p:nvSpPr>
-          <p:cNvPr id="61" name="TextBox 60"/>
-          <p:cNvSpPr txBox="1"/>
-          <p:nvPr/>
-        </p:nvSpPr>
-        <p:spPr>
-          <a:xfrm>
-            <a:off x="320040" y="5376672"/>
-            <a:ext cx="502920" cy="329184"/>
-          </a:xfrm>
-          <a:prstGeom prst="rect">
-            <a:avLst/>
-          </a:prstGeom>
-          <a:noFill/>
-        </p:spPr>
-        <p:txBody>
-          <a:bodyPr wrap="square">
-            <a:spAutoFit/>
-          </a:bodyPr>
-          <a:lstStyle/>
-          <a:p>
-            <a:pPr algn="ctr"/>
-            <a:r>
-              <a:rPr sz="1100" b="1" i="0">
-                <a:solidFill>
-                  <a:srgbClr val="0A2955"/>
-                </a:solidFill>
-              </a:rPr>
-              <a:t>12</a:t>
-            </a:r>
-          </a:p>
-        </p:txBody>
-      </p:sp>
-      <p:sp>
-        <p:nvSpPr>
-          <p:cNvPr id="62" name="Rectangle 61"/>
-          <p:cNvSpPr/>
-          <p:nvPr/>
-        </p:nvSpPr>
-        <p:spPr>
-          <a:xfrm>
-            <a:off x="868680" y="5404104"/>
-            <a:ext cx="1463040" cy="274320"/>
-          </a:xfrm>
-          <a:prstGeom prst="rect">
-            <a:avLst/>
-          </a:prstGeom>
-          <a:solidFill>
             <a:srgbClr val="175CA6"/>
           </a:solidFill>
           <a:ln w="3810">
@@ -7695,13 +7504,13 @@
       </p:sp>
       <p:sp>
         <p:nvSpPr>
-          <p:cNvPr id="63" name="TextBox 62"/>
+          <p:cNvPr id="58" name="TextBox 57"/>
           <p:cNvSpPr txBox="1"/>
           <p:nvPr/>
         </p:nvSpPr>
         <p:spPr>
           <a:xfrm>
-            <a:off x="868680" y="5404104"/>
+            <a:off x="868680" y="5001768"/>
             <a:ext cx="1463040" cy="274320"/>
           </a:xfrm>
           <a:prstGeom prst="rect">
@@ -7729,13 +7538,13 @@
       </p:sp>
       <p:sp>
         <p:nvSpPr>
-          <p:cNvPr id="64" name="TextBox 63"/>
+          <p:cNvPr id="59" name="TextBox 58"/>
           <p:cNvSpPr txBox="1"/>
           <p:nvPr/>
         </p:nvSpPr>
         <p:spPr>
           <a:xfrm>
-            <a:off x="2423160" y="5376672"/>
+            <a:off x="2423160" y="4974336"/>
             <a:ext cx="9418320" cy="329184"/>
           </a:xfrm>
           <a:prstGeom prst="rect">
@@ -7756,7 +7565,7 @@
                   <a:srgbClr val="444444"/>
                 </a:solidFill>
               </a:rPr>
-              <a:t>Prints overloaded cell list to user</a:t>
+              <a:t>Prints streamed overloaded cell list to operator terminal</a:t>
             </a:r>
           </a:p>
         </p:txBody>
